--- a/data/outputs/v2/Biology/SS1.2_Chemicals_of_Life/quiz/Biology_G10_SS1.2_Chemicals_of_Life_L4_QuickCheck.pptx
+++ b/data/outputs/v2/Biology/SS1.2_Chemicals_of_Life/quiz/Biology_G10_SS1.2_Chemicals_of_Life_L4_QuickCheck.pptx
@@ -14,10 +14,9 @@
     <p:sldId id="262" r:id="rId8"/>
     <p:sldId id="263" r:id="rId9"/>
     <p:sldId id="264" r:id="rId10"/>
-    <p:sldId id="265" r:id="rId11"/>
   </p:sldIdLst>
   <p:notesMasterIdLst>
-    <p:notesMasterId r:id="rId12"/>
+    <p:notesMasterId r:id="rId11"/>
   </p:notesMasterIdLst>
   <p:sldSz cx="12192000" cy="6858000"/>
   <p:notesSz cx="6858000" cy="12192000"/>
@@ -535,94 +534,6 @@
             <a:fld id="{F7021451-1387-4CA6-816F-3879F97B5CBC}" type="slidenum">
               <a:rPr lang="en-US"/>
               <a:t>1</a:t>
-            </a:fld>
-            <a:endParaRPr lang="en-US"/>
-          </a:p>
-        </p:txBody>
-      </p:sp>
-    </p:spTree>
-    <p:extLst>
-      <p:ext uri="{BB962C8B-B14F-4D97-AF65-F5344CB8AC3E}">
-        <p14:creationId xmlns:p14="http://schemas.microsoft.com/office/powerpoint/2010/main" val="1024086991"/>
-      </p:ext>
-    </p:extLst>
-  </p:cSld>
-  <p:clrMapOvr>
-    <a:masterClrMapping/>
-  </p:clrMapOvr>
-</p:notes>
-</file>
-
-<file path=ppt/notesSlides/notesSlide10.xml><?xml version="1.0" encoding="utf-8"?>
-<p:notes xmlns:a="http://schemas.openxmlformats.org/drawingml/2006/main" xmlns:r="http://schemas.openxmlformats.org/officeDocument/2006/relationships" xmlns:p="http://schemas.openxmlformats.org/presentationml/2006/main">
-  <p:cSld>
-    <p:spTree>
-      <p:nvGrpSpPr>
-        <p:cNvPr id="1" name=""/>
-        <p:cNvGrpSpPr/>
-        <p:nvPr/>
-      </p:nvGrpSpPr>
-      <p:grpSpPr>
-        <a:xfrm>
-          <a:off x="0" y="0"/>
-          <a:ext cx="0" cy="0"/>
-          <a:chOff x="0" y="0"/>
-          <a:chExt cx="0" cy="0"/>
-        </a:xfrm>
-      </p:grpSpPr>
-      <p:sp>
-        <p:nvSpPr>
-          <p:cNvPr id="2" name="Slide Image Placeholder 1"/>
-          <p:cNvSpPr>
-            <a:spLocks noGrp="1" noRot="1" noChangeAspect="1"/>
-          </p:cNvSpPr>
-          <p:nvPr>
-            <p:ph type="sldImg"/>
-          </p:nvPr>
-        </p:nvSpPr>
-        <p:spPr/>
-      </p:sp>
-      <p:sp>
-        <p:nvSpPr>
-          <p:cNvPr id="3" name="Notes Placeholder 2"/>
-          <p:cNvSpPr>
-            <a:spLocks noGrp="1"/>
-          </p:cNvSpPr>
-          <p:nvPr>
-            <p:ph type="body" idx="1"/>
-          </p:nvPr>
-        </p:nvSpPr>
-        <p:spPr/>
-        <p:txBody>
-          <a:bodyPr/>
-          <a:lstStyle/>
-          <a:p>
-            <a:r>
-              <a:rPr lang="en-US" dirty="0"/>
-              <a:t/>
-            </a:r>
-            <a:endParaRPr lang="en-US" dirty="0"/>
-          </a:p>
-        </p:txBody>
-      </p:sp>
-      <p:sp>
-        <p:nvSpPr>
-          <p:cNvPr id="4" name="Slide Number Placeholder 3"/>
-          <p:cNvSpPr>
-            <a:spLocks noGrp="1"/>
-          </p:cNvSpPr>
-          <p:nvPr>
-            <p:ph type="sldNum" sz="quarter" idx="10"/>
-          </p:nvPr>
-        </p:nvSpPr>
-        <p:spPr/>
-        <p:txBody>
-          <a:bodyPr/>
-          <a:lstStyle/>
-          <a:p>
-            <a:fld id="{F7021451-1387-4CA6-816F-3879F97B5CBC}" type="slidenum">
-              <a:rPr lang="en-US"/>
-              <a:t>10</a:t>
             </a:fld>
             <a:endParaRPr lang="en-US"/>
           </a:p>
@@ -1787,7 +1698,7 @@
                 <a:ea typeface="Arial" pitchFamily="34" charset="-122"/>
                 <a:cs typeface="Arial" pitchFamily="34" charset="-120"/>
               </a:rPr>
-              <a:t>Lesson 4: Building Life's Molecules: Structure of Carbohydrates and Proteins</a:t>
+              <a:t>Lesson 4: Proteins and Lipids: Do They Cause the Glucose Spike?</a:t>
             </a:r>
             <a:endParaRPr lang="en-US" sz="2000" dirty="0"/>
           </a:p>
@@ -1826,7 +1737,7 @@
                 <a:ea typeface="Arial" pitchFamily="34" charset="-122"/>
                 <a:cs typeface="Arial" pitchFamily="34" charset="-120"/>
               </a:rPr>
-              <a:t>8 multiple-choice questions  •  choose A, B, C or D</a:t>
+              <a:t>7 multiple-choice questions  •  choose A, B, C or D</a:t>
             </a:r>
             <a:endParaRPr lang="en-US" sz="1600" dirty="0"/>
           </a:p>
@@ -1942,116 +1853,6 @@
               <a:t> (https://creativecommons.org/licenses/by-nc/4.0/).</a:t>
             </a:r>
             <a:endParaRPr lang="en-US" sz="900" dirty="0"/>
-          </a:p>
-        </p:txBody>
-      </p:sp>
-    </p:spTree>
-  </p:cSld>
-  <p:clrMapOvr>
-    <a:masterClrMapping/>
-  </p:clrMapOvr>
-</p:sld>
-</file>
-
-<file path=ppt/slides/slide10.xml><?xml version="1.0" encoding="utf-8"?>
-<p:sld xmlns:a="http://schemas.openxmlformats.org/drawingml/2006/main" xmlns:r="http://schemas.openxmlformats.org/officeDocument/2006/relationships" xmlns:p="http://schemas.openxmlformats.org/presentationml/2006/main">
-  <p:cSld name="Slide 10">
-    <p:bg>
-      <p:bgPr>
-        <a:solidFill>
-          <a:srgbClr val="1F3864"/>
-        </a:solidFill>
-      </p:bgPr>
-    </p:bg>
-    <p:spTree>
-      <p:nvGrpSpPr>
-        <p:cNvPr id="1" name=""/>
-        <p:cNvGrpSpPr/>
-        <p:nvPr/>
-      </p:nvGrpSpPr>
-      <p:grpSpPr>
-        <a:xfrm>
-          <a:off x="0" y="0"/>
-          <a:ext cx="0" cy="0"/>
-          <a:chOff x="0" y="0"/>
-          <a:chExt cx="0" cy="0"/>
-        </a:xfrm>
-      </p:grpSpPr>
-      <p:sp>
-        <p:nvSpPr>
-          <p:cNvPr id="2" name="Text 0"/>
-          <p:cNvSpPr/>
-          <p:nvPr/>
-        </p:nvSpPr>
-        <p:spPr>
-          <a:xfrm>
-            <a:off x="731520" y="2194560"/>
-            <a:ext cx="10698480" cy="822960"/>
-          </a:xfrm>
-          <a:prstGeom prst="rect">
-            <a:avLst/>
-          </a:prstGeom>
-          <a:noFill/>
-          <a:ln/>
-        </p:spPr>
-        <p:txBody>
-          <a:bodyPr wrap="square" lIns="0" tIns="0" rIns="0" bIns="0" rtlCol="0" anchor="ctr"/>
-          <a:lstStyle/>
-          <a:p>
-            <a:pPr indent="0" marL="0">
-              <a:buNone/>
-            </a:pPr>
-            <a:r>
-              <a:rPr lang="en-US" sz="3400" b="1" dirty="0">
-                <a:solidFill>
-                  <a:srgbClr val="FFFFFF"/>
-                </a:solidFill>
-                <a:latin typeface="Arial" pitchFamily="34" charset="0"/>
-                <a:ea typeface="Arial" pitchFamily="34" charset="-122"/>
-                <a:cs typeface="Arial" pitchFamily="34" charset="-120"/>
-              </a:rPr>
-              <a:t>All done</a:t>
-            </a:r>
-            <a:endParaRPr lang="en-US" sz="3400" dirty="0"/>
-          </a:p>
-        </p:txBody>
-      </p:sp>
-      <p:sp>
-        <p:nvSpPr>
-          <p:cNvPr id="3" name="Text 1"/>
-          <p:cNvSpPr/>
-          <p:nvPr/>
-        </p:nvSpPr>
-        <p:spPr>
-          <a:xfrm>
-            <a:off x="731520" y="3108960"/>
-            <a:ext cx="10698480" cy="731520"/>
-          </a:xfrm>
-          <a:prstGeom prst="rect">
-            <a:avLst/>
-          </a:prstGeom>
-          <a:noFill/>
-          <a:ln/>
-        </p:spPr>
-        <p:txBody>
-          <a:bodyPr wrap="square" lIns="0" tIns="0" rIns="0" bIns="0" rtlCol="0" anchor="ctr"/>
-          <a:lstStyle/>
-          <a:p>
-            <a:pPr indent="0" marL="0">
-              <a:buNone/>
-            </a:pPr>
-            <a:r>
-              <a:rPr lang="en-US" sz="1800" dirty="0">
-                <a:solidFill>
-                  <a:srgbClr val="D9EEF1"/>
-                </a:solidFill>
-                <a:latin typeface="Arial" pitchFamily="34" charset="0"/>
-                <a:ea typeface="Arial" pitchFamily="34" charset="-122"/>
-                <a:cs typeface="Arial" pitchFamily="34" charset="-120"/>
-              </a:rPr>
-              <a:t>Ask your teacher how to submit your answers today (for example, on a paper answer slip).</a:t>
-            </a:r>
-            <a:endParaRPr lang="en-US" sz="1800" dirty="0"/>
           </a:p>
         </p:txBody>
       </p:sp>
@@ -2120,7 +1921,7 @@
                 <a:ea typeface="Arial" pitchFamily="34" charset="-122"/>
                 <a:cs typeface="Arial" pitchFamily="34" charset="-120"/>
               </a:rPr>
-              <a:t>QUESTION 1 OF 8</a:t>
+              <a:t>QUESTION 1 OF 7</a:t>
             </a:r>
             <a:endParaRPr lang="en-US" sz="1300" dirty="0"/>
           </a:p>
@@ -2181,7 +1982,7 @@
                 <a:ea typeface="Arial" pitchFamily="34" charset="-122"/>
                 <a:cs typeface="Arial" pitchFamily="34" charset="-120"/>
               </a:rPr>
-              <a:t>Use after: Observe phase</a:t>
+              <a:t>Use after: Predict phase</a:t>
             </a:r>
             <a:endParaRPr lang="en-US" sz="1100" dirty="0"/>
           </a:p>
@@ -2220,7 +2021,7 @@
                 <a:ea typeface="Arial" pitchFamily="34" charset="-122"/>
                 <a:cs typeface="Arial" pitchFamily="34" charset="-120"/>
               </a:rPr>
-              <a:t>Ugali is mostly starch, which is a long chain made of many small units joined together. Which small unit is repeated in a starch chain?</a:t>
+              <a:t>Before the tests, a learner says: "Iodine shows starch in ugali, so I will use iodine to find out whether beans contain protein." Which response is correct?</a:t>
             </a:r>
             <a:endParaRPr lang="en-US" sz="2000" dirty="0"/>
           </a:p>
@@ -2312,7 +2113,7 @@
               <a:buNone/>
             </a:pPr>
             <a:r>
-              <a:rPr lang="en-US" sz="1700" dirty="0">
+              <a:rPr lang="en-US" sz="1500" dirty="0">
                 <a:solidFill>
                   <a:srgbClr val="FFFFFF"/>
                 </a:solidFill>
@@ -2320,9 +2121,9 @@
                 <a:ea typeface="Arial" pitchFamily="34" charset="-122"/>
                 <a:cs typeface="Arial" pitchFamily="34" charset="-120"/>
               </a:rPr>
-              <a:t>Amino acid</a:t>
-            </a:r>
-            <a:endParaRPr lang="en-US" sz="1700" dirty="0"/>
+              <a:t>Iodine will turn violet if protein is present, so the plan works</a:t>
+            </a:r>
+            <a:endParaRPr lang="en-US" sz="1500" dirty="0"/>
           </a:p>
         </p:txBody>
       </p:sp>
@@ -2412,7 +2213,7 @@
               <a:buNone/>
             </a:pPr>
             <a:r>
-              <a:rPr lang="en-US" sz="1700" dirty="0">
+              <a:rPr lang="en-US" sz="1500" dirty="0">
                 <a:solidFill>
                   <a:srgbClr val="FFFFFF"/>
                 </a:solidFill>
@@ -2420,9 +2221,9 @@
                 <a:ea typeface="Arial" pitchFamily="34" charset="-122"/>
                 <a:cs typeface="Arial" pitchFamily="34" charset="-120"/>
               </a:rPr>
-              <a:t>Maltose</a:t>
-            </a:r>
-            <a:endParaRPr lang="en-US" sz="1700" dirty="0"/>
+              <a:t>Iodine tests for all food chemicals, so it will show protein and fat as well</a:t>
+            </a:r>
+            <a:endParaRPr lang="en-US" sz="1500" dirty="0"/>
           </a:p>
         </p:txBody>
       </p:sp>
@@ -2512,7 +2313,7 @@
               <a:buNone/>
             </a:pPr>
             <a:r>
-              <a:rPr lang="en-US" sz="1700" dirty="0">
+              <a:rPr lang="en-US" sz="1500" dirty="0">
                 <a:solidFill>
                   <a:srgbClr val="FFFFFF"/>
                 </a:solidFill>
@@ -2520,9 +2321,9 @@
                 <a:ea typeface="Arial" pitchFamily="34" charset="-122"/>
                 <a:cs typeface="Arial" pitchFamily="34" charset="-120"/>
               </a:rPr>
-              <a:t>Glucose</a:t>
-            </a:r>
-            <a:endParaRPr lang="en-US" sz="1700" dirty="0"/>
+              <a:t>Iodine tests for starch only, so a different test (the biuret test) is needed for protein</a:t>
+            </a:r>
+            <a:endParaRPr lang="en-US" sz="1500" dirty="0"/>
           </a:p>
         </p:txBody>
       </p:sp>
@@ -2612,7 +2413,7 @@
               <a:buNone/>
             </a:pPr>
             <a:r>
-              <a:rPr lang="en-US" sz="1700" dirty="0">
+              <a:rPr lang="en-US" sz="1500" dirty="0">
                 <a:solidFill>
                   <a:srgbClr val="FFFFFF"/>
                 </a:solidFill>
@@ -2620,9 +2421,9 @@
                 <a:ea typeface="Arial" pitchFamily="34" charset="-122"/>
                 <a:cs typeface="Arial" pitchFamily="34" charset="-120"/>
               </a:rPr>
-              <a:t>Glycogen</a:t>
-            </a:r>
-            <a:endParaRPr lang="en-US" sz="1700" dirty="0"/>
+              <a:t>Protein cannot be tested for in the laboratory, so beans must be judged by taste</a:t>
+            </a:r>
+            <a:endParaRPr lang="en-US" sz="1500" dirty="0"/>
           </a:p>
         </p:txBody>
       </p:sp>
@@ -2730,7 +2531,7 @@
                 <a:ea typeface="Arial" pitchFamily="34" charset="-122"/>
                 <a:cs typeface="Arial" pitchFamily="34" charset="-120"/>
               </a:rPr>
-              <a:t>QUESTION 2 OF 8</a:t>
+              <a:t>QUESTION 2 OF 7</a:t>
             </a:r>
             <a:endParaRPr lang="en-US" sz="1300" dirty="0"/>
           </a:p>
@@ -2822,7 +2623,7 @@
               <a:buNone/>
             </a:pPr>
             <a:r>
-              <a:rPr lang="en-US" sz="2300" b="1" dirty="0">
+              <a:rPr lang="en-US" sz="1800" b="1" dirty="0">
                 <a:solidFill>
                   <a:srgbClr val="FFFFFF"/>
                 </a:solidFill>
@@ -2830,9 +2631,9 @@
                 <a:ea typeface="Arial" pitchFamily="34" charset="-122"/>
                 <a:cs typeface="Arial" pitchFamily="34" charset="-120"/>
               </a:rPr>
-              <a:t>Two glucose molecules join to form maltose, a disaccharide. What is the name of the bond that joins them?</a:t>
-            </a:r>
-            <a:endParaRPr lang="en-US" sz="2300" dirty="0"/>
+              <a:t>A group adds 2 cm³ of dilute sodium hydroxide and then 2-3 drops of dilute copper sulphate to a tube of bean paste mixed with water. The mixture turns violet (purple). What does this result show?</a:t>
+            </a:r>
+            <a:endParaRPr lang="en-US" sz="1800" dirty="0"/>
           </a:p>
         </p:txBody>
       </p:sp>
@@ -2930,7 +2731,7 @@
                 <a:ea typeface="Arial" pitchFamily="34" charset="-122"/>
                 <a:cs typeface="Arial" pitchFamily="34" charset="-120"/>
               </a:rPr>
-              <a:t>Glycosidic bond</a:t>
+              <a:t>The beans contain starch</a:t>
             </a:r>
             <a:endParaRPr lang="en-US" sz="1700" dirty="0"/>
           </a:p>
@@ -3030,7 +2831,7 @@
                 <a:ea typeface="Arial" pitchFamily="34" charset="-122"/>
                 <a:cs typeface="Arial" pitchFamily="34" charset="-120"/>
               </a:rPr>
-              <a:t>Peptide bond</a:t>
+              <a:t>The beans contain protein</a:t>
             </a:r>
             <a:endParaRPr lang="en-US" sz="1700" dirty="0"/>
           </a:p>
@@ -3130,7 +2931,7 @@
                 <a:ea typeface="Arial" pitchFamily="34" charset="-122"/>
                 <a:cs typeface="Arial" pitchFamily="34" charset="-120"/>
               </a:rPr>
-              <a:t>Protein bond</a:t>
+              <a:t>The beans contain lipids (fats and oils)</a:t>
             </a:r>
             <a:endParaRPr lang="en-US" sz="1700" dirty="0"/>
           </a:p>
@@ -3230,7 +3031,7 @@
                 <a:ea typeface="Arial" pitchFamily="34" charset="-122"/>
                 <a:cs typeface="Arial" pitchFamily="34" charset="-120"/>
               </a:rPr>
-              <a:t>Amino bond</a:t>
+              <a:t>The beans contain reducing sugar</a:t>
             </a:r>
             <a:endParaRPr lang="en-US" sz="1700" dirty="0"/>
           </a:p>
@@ -3340,7 +3141,7 @@
                 <a:ea typeface="Arial" pitchFamily="34" charset="-122"/>
                 <a:cs typeface="Arial" pitchFamily="34" charset="-120"/>
               </a:rPr>
-              <a:t>QUESTION 3 OF 8</a:t>
+              <a:t>QUESTION 3 OF 7</a:t>
             </a:r>
             <a:endParaRPr lang="en-US" sz="1300" dirty="0"/>
           </a:p>
@@ -3432,7 +3233,7 @@
               <a:buNone/>
             </a:pPr>
             <a:r>
-              <a:rPr lang="en-US" sz="1800" b="1" dirty="0">
+              <a:rPr lang="en-US" sz="2000" b="1" dirty="0">
                 <a:solidFill>
                   <a:srgbClr val="FFFFFF"/>
                 </a:solidFill>
@@ -3440,9 +3241,9 @@
                 <a:ea typeface="Arial" pitchFamily="34" charset="-122"/>
                 <a:cs typeface="Arial" pitchFamily="34" charset="-120"/>
               </a:rPr>
-              <a:t>In a model, each bottle top is an amino acid and each straw is a peptide bond. A group joins 3 bottle tops in a single chain to make a tripeptide. How many straws (peptide bonds) do they need?</a:t>
-            </a:r>
-            <a:endParaRPr lang="en-US" sz="1800" dirty="0"/>
+              <a:t>A learner rubs crushed groundnuts on a piece of brown paper, dries it gently and holds it up to the light. A translucent (see-through) spot is left on the paper. What does this show?</a:t>
+            </a:r>
+            <a:endParaRPr lang="en-US" sz="2000" dirty="0"/>
           </a:p>
         </p:txBody>
       </p:sp>
@@ -3540,7 +3341,7 @@
                 <a:ea typeface="Arial" pitchFamily="34" charset="-122"/>
                 <a:cs typeface="Arial" pitchFamily="34" charset="-120"/>
               </a:rPr>
-              <a:t>1</a:t>
+              <a:t>The groundnuts contain starch</a:t>
             </a:r>
             <a:endParaRPr lang="en-US" sz="1700" dirty="0"/>
           </a:p>
@@ -3640,7 +3441,7 @@
                 <a:ea typeface="Arial" pitchFamily="34" charset="-122"/>
                 <a:cs typeface="Arial" pitchFamily="34" charset="-120"/>
               </a:rPr>
-              <a:t>3</a:t>
+              <a:t>The groundnuts contain protein</a:t>
             </a:r>
             <a:endParaRPr lang="en-US" sz="1700" dirty="0"/>
           </a:p>
@@ -3740,7 +3541,7 @@
                 <a:ea typeface="Arial" pitchFamily="34" charset="-122"/>
                 <a:cs typeface="Arial" pitchFamily="34" charset="-120"/>
               </a:rPr>
-              <a:t>2</a:t>
+              <a:t>The groundnuts contain lipids (oil)</a:t>
             </a:r>
             <a:endParaRPr lang="en-US" sz="1700" dirty="0"/>
           </a:p>
@@ -3840,7 +3641,7 @@
                 <a:ea typeface="Arial" pitchFamily="34" charset="-122"/>
                 <a:cs typeface="Arial" pitchFamily="34" charset="-120"/>
               </a:rPr>
-              <a:t>4</a:t>
+              <a:t>The groundnuts contain only water, which has made the paper thin</a:t>
             </a:r>
             <a:endParaRPr lang="en-US" sz="1700" dirty="0"/>
           </a:p>
@@ -3950,7 +3751,7 @@
                 <a:ea typeface="Arial" pitchFamily="34" charset="-122"/>
                 <a:cs typeface="Arial" pitchFamily="34" charset="-120"/>
               </a:rPr>
-              <a:t>QUESTION 4 OF 8</a:t>
+              <a:t>QUESTION 4 OF 7</a:t>
             </a:r>
             <a:endParaRPr lang="en-US" sz="1300" dirty="0"/>
           </a:p>
@@ -4011,7 +3812,7 @@
                 <a:ea typeface="Arial" pitchFamily="34" charset="-122"/>
                 <a:cs typeface="Arial" pitchFamily="34" charset="-120"/>
               </a:rPr>
-              <a:t>Use after: Observe phase</a:t>
+              <a:t>Use after: Explain phase</a:t>
             </a:r>
             <a:endParaRPr lang="en-US" sz="1100" dirty="0"/>
           </a:p>
@@ -4042,7 +3843,7 @@
               <a:buNone/>
             </a:pPr>
             <a:r>
-              <a:rPr lang="en-US" sz="2000" b="1" dirty="0">
+              <a:rPr lang="en-US" sz="2300" b="1" dirty="0">
                 <a:solidFill>
                   <a:srgbClr val="FFFFFF"/>
                 </a:solidFill>
@@ -4050,9 +3851,9 @@
                 <a:ea typeface="Arial" pitchFamily="34" charset="-122"/>
                 <a:cs typeface="Arial" pitchFamily="34" charset="-120"/>
               </a:rPr>
-              <a:t>Groups built protein models using bottle tops of different colours for different R-groups. What does this model show about why proteins are so varied?</a:t>
-            </a:r>
-            <a:endParaRPr lang="en-US" sz="2000" dirty="0"/>
+              <a:t>Which row correctly matches each food chemical to the smaller units it is built from?</a:t>
+            </a:r>
+            <a:endParaRPr lang="en-US" sz="2300" dirty="0"/>
           </a:p>
         </p:txBody>
       </p:sp>
@@ -4142,7 +3943,7 @@
               <a:buNone/>
             </a:pPr>
             <a:r>
-              <a:rPr lang="en-US" sz="1700" dirty="0">
+              <a:rPr lang="en-US" sz="1500" dirty="0">
                 <a:solidFill>
                   <a:srgbClr val="FFFFFF"/>
                 </a:solidFill>
@@ -4150,9 +3951,9 @@
                 <a:ea typeface="Arial" pitchFamily="34" charset="-122"/>
                 <a:cs typeface="Arial" pitchFamily="34" charset="-120"/>
               </a:rPr>
-              <a:t>Different amino acids can be joined in many different orders and combinations</a:t>
-            </a:r>
-            <a:endParaRPr lang="en-US" sz="1700" dirty="0"/>
+              <a:t>Carbohydrates: glucose units; proteins: amino acids; lipids: fatty acids and glycerol</a:t>
+            </a:r>
+            <a:endParaRPr lang="en-US" sz="1500" dirty="0"/>
           </a:p>
         </p:txBody>
       </p:sp>
@@ -4242,7 +4043,7 @@
               <a:buNone/>
             </a:pPr>
             <a:r>
-              <a:rPr lang="en-US" sz="1700" dirty="0">
+              <a:rPr lang="en-US" sz="1500" dirty="0">
                 <a:solidFill>
                   <a:srgbClr val="FFFFFF"/>
                 </a:solidFill>
@@ -4250,9 +4051,9 @@
                 <a:ea typeface="Arial" pitchFamily="34" charset="-122"/>
                 <a:cs typeface="Arial" pitchFamily="34" charset="-120"/>
               </a:rPr>
-              <a:t>Proteins are made of only one type of amino acid repeated many times</a:t>
-            </a:r>
-            <a:endParaRPr lang="en-US" sz="1700" dirty="0"/>
+              <a:t>Carbohydrates: glucose units; proteins: fatty acids and glycerol; lipids: amino acids</a:t>
+            </a:r>
+            <a:endParaRPr lang="en-US" sz="1500" dirty="0"/>
           </a:p>
         </p:txBody>
       </p:sp>
@@ -4342,7 +4143,7 @@
               <a:buNone/>
             </a:pPr>
             <a:r>
-              <a:rPr lang="en-US" sz="1700" dirty="0">
+              <a:rPr lang="en-US" sz="1500" dirty="0">
                 <a:solidFill>
                   <a:srgbClr val="FFFFFF"/>
                 </a:solidFill>
@@ -4350,9 +4151,9 @@
                 <a:ea typeface="Arial" pitchFamily="34" charset="-122"/>
                 <a:cs typeface="Arial" pitchFamily="34" charset="-120"/>
               </a:rPr>
-              <a:t>Each protein uses a different kind of bond to join its units</a:t>
-            </a:r>
-            <a:endParaRPr lang="en-US" sz="1700" dirty="0"/>
+              <a:t>Carbohydrates: amino acids; proteins: glucose units; lipids: fatty acids and glycerol</a:t>
+            </a:r>
+            <a:endParaRPr lang="en-US" sz="1500" dirty="0"/>
           </a:p>
         </p:txBody>
       </p:sp>
@@ -4442,7 +4243,7 @@
               <a:buNone/>
             </a:pPr>
             <a:r>
-              <a:rPr lang="en-US" sz="1700" dirty="0">
+              <a:rPr lang="en-US" sz="1500" dirty="0">
                 <a:solidFill>
                   <a:srgbClr val="FFFFFF"/>
                 </a:solidFill>
@@ -4450,9 +4251,9 @@
                 <a:ea typeface="Arial" pitchFamily="34" charset="-122"/>
                 <a:cs typeface="Arial" pitchFamily="34" charset="-120"/>
               </a:rPr>
-              <a:t>Proteins are varied because they contain more glucose than starch does</a:t>
-            </a:r>
-            <a:endParaRPr lang="en-US" sz="1700" dirty="0"/>
+              <a:t>Carbohydrates: fatty acids and glycerol; proteins: glucose units; lipids: amino acids</a:t>
+            </a:r>
+            <a:endParaRPr lang="en-US" sz="1500" dirty="0"/>
           </a:p>
         </p:txBody>
       </p:sp>
@@ -4560,7 +4361,7 @@
                 <a:ea typeface="Arial" pitchFamily="34" charset="-122"/>
                 <a:cs typeface="Arial" pitchFamily="34" charset="-120"/>
               </a:rPr>
-              <a:t>QUESTION 5 OF 8</a:t>
+              <a:t>QUESTION 5 OF 7</a:t>
             </a:r>
             <a:endParaRPr lang="en-US" sz="1300" dirty="0"/>
           </a:p>
@@ -4621,7 +4422,7 @@
                 <a:ea typeface="Arial" pitchFamily="34" charset="-122"/>
                 <a:cs typeface="Arial" pitchFamily="34" charset="-120"/>
               </a:rPr>
-              <a:t>Use after: Observe phase</a:t>
+              <a:t>Use after: Explain phase</a:t>
             </a:r>
             <a:endParaRPr lang="en-US" sz="1100" dirty="0"/>
           </a:p>
@@ -4660,7 +4461,7 @@
                 <a:ea typeface="Arial" pitchFamily="34" charset="-122"/>
                 <a:cs typeface="Arial" pitchFamily="34" charset="-120"/>
               </a:rPr>
-              <a:t>Glycogen is stored in animal tissue such as the meat in nyama choma. On a chart with the columns Monosaccharide, Disaccharide, Polysaccharide and Protein, where does glycogen belong?</a:t>
+              <a:t>Wanjiru's ugali contains about 70 g of carbohydrate and about 10 g of fat. About how many times more carbohydrate than fat is this?</a:t>
             </a:r>
             <a:endParaRPr lang="en-US" sz="2000" dirty="0"/>
           </a:p>
@@ -4760,7 +4561,7 @@
                 <a:ea typeface="Arial" pitchFamily="34" charset="-122"/>
                 <a:cs typeface="Arial" pitchFamily="34" charset="-120"/>
               </a:rPr>
-              <a:t>Monosaccharide</a:t>
+              <a:t>60 times</a:t>
             </a:r>
             <a:endParaRPr lang="en-US" sz="1700" dirty="0"/>
           </a:p>
@@ -4860,7 +4661,7 @@
                 <a:ea typeface="Arial" pitchFamily="34" charset="-122"/>
                 <a:cs typeface="Arial" pitchFamily="34" charset="-120"/>
               </a:rPr>
-              <a:t>Polysaccharide</a:t>
+              <a:t>80 times</a:t>
             </a:r>
             <a:endParaRPr lang="en-US" sz="1700" dirty="0"/>
           </a:p>
@@ -4960,7 +4761,7 @@
                 <a:ea typeface="Arial" pitchFamily="34" charset="-122"/>
                 <a:cs typeface="Arial" pitchFamily="34" charset="-120"/>
               </a:rPr>
-              <a:t>Protein</a:t>
+              <a:t>7 times</a:t>
             </a:r>
             <a:endParaRPr lang="en-US" sz="1700" dirty="0"/>
           </a:p>
@@ -5060,7 +4861,7 @@
                 <a:ea typeface="Arial" pitchFamily="34" charset="-122"/>
                 <a:cs typeface="Arial" pitchFamily="34" charset="-120"/>
               </a:rPr>
-              <a:t>Disaccharide</a:t>
+              <a:t>0.14 times</a:t>
             </a:r>
             <a:endParaRPr lang="en-US" sz="1700" dirty="0"/>
           </a:p>
@@ -5170,7 +4971,7 @@
                 <a:ea typeface="Arial" pitchFamily="34" charset="-122"/>
                 <a:cs typeface="Arial" pitchFamily="34" charset="-120"/>
               </a:rPr>
-              <a:t>QUESTION 6 OF 8</a:t>
+              <a:t>QUESTION 6 OF 7</a:t>
             </a:r>
             <a:endParaRPr lang="en-US" sz="1300" dirty="0"/>
           </a:p>
@@ -5262,7 +5063,7 @@
               <a:buNone/>
             </a:pPr>
             <a:r>
-              <a:rPr lang="en-US" sz="2300" b="1" dirty="0">
+              <a:rPr lang="en-US" sz="2000" b="1" dirty="0">
                 <a:solidFill>
                   <a:srgbClr val="FFFFFF"/>
                 </a:solidFill>
@@ -5270,9 +5071,9 @@
                 <a:ea typeface="Arial" pitchFamily="34" charset="-122"/>
                 <a:cs typeface="Arial" pitchFamily="34" charset="-120"/>
               </a:rPr>
-              <a:t>Glucose contains carbon, hydrogen and oxygen only. Which extra element is found in amino acids but NOT in glucose?</a:t>
-            </a:r>
-            <a:endParaRPr lang="en-US" sz="2300" dirty="0"/>
+              <a:t>Beans, milk and groundnuts are not the main cause of the glucose spike after a meal. Why do they still matter for the body?</a:t>
+            </a:r>
+            <a:endParaRPr lang="en-US" sz="2000" dirty="0"/>
           </a:p>
         </p:txBody>
       </p:sp>
@@ -5362,7 +5163,7 @@
               <a:buNone/>
             </a:pPr>
             <a:r>
-              <a:rPr lang="en-US" sz="1700" dirty="0">
+              <a:rPr lang="en-US" sz="1500" dirty="0">
                 <a:solidFill>
                   <a:srgbClr val="FFFFFF"/>
                 </a:solidFill>
@@ -5370,9 +5171,9 @@
                 <a:ea typeface="Arial" pitchFamily="34" charset="-122"/>
                 <a:cs typeface="Arial" pitchFamily="34" charset="-120"/>
               </a:rPr>
-              <a:t>Oxygen</a:t>
-            </a:r>
-            <a:endParaRPr lang="en-US" sz="1700" dirty="0"/>
+              <a:t>They are turned into glucose immediately, so they cause the spike as well</a:t>
+            </a:r>
+            <a:endParaRPr lang="en-US" sz="1500" dirty="0"/>
           </a:p>
         </p:txBody>
       </p:sp>
@@ -5462,7 +5263,7 @@
               <a:buNone/>
             </a:pPr>
             <a:r>
-              <a:rPr lang="en-US" sz="1700" dirty="0">
+              <a:rPr lang="en-US" sz="1500" dirty="0">
                 <a:solidFill>
                   <a:srgbClr val="FFFFFF"/>
                 </a:solidFill>
@@ -5470,9 +5271,9 @@
                 <a:ea typeface="Arial" pitchFamily="34" charset="-122"/>
                 <a:cs typeface="Arial" pitchFamily="34" charset="-120"/>
               </a:rPr>
-              <a:t>Hydrogen</a:t>
-            </a:r>
-            <a:endParaRPr lang="en-US" sz="1700" dirty="0"/>
+              <a:t>They only add sweetness, so they have no use in the body</a:t>
+            </a:r>
+            <a:endParaRPr lang="en-US" sz="1500" dirty="0"/>
           </a:p>
         </p:txBody>
       </p:sp>
@@ -5562,7 +5363,7 @@
               <a:buNone/>
             </a:pPr>
             <a:r>
-              <a:rPr lang="en-US" sz="1700" dirty="0">
+              <a:rPr lang="en-US" sz="1500" dirty="0">
                 <a:solidFill>
                   <a:srgbClr val="FFFFFF"/>
                 </a:solidFill>
@@ -5570,9 +5371,9 @@
                 <a:ea typeface="Arial" pitchFamily="34" charset="-122"/>
                 <a:cs typeface="Arial" pitchFamily="34" charset="-120"/>
               </a:rPr>
-              <a:t>Nitrogen</a:t>
-            </a:r>
-            <a:endParaRPr lang="en-US" sz="1700" dirty="0"/>
+              <a:t>They replace carbohydrates completely, so ugali is not needed</a:t>
+            </a:r>
+            <a:endParaRPr lang="en-US" sz="1500" dirty="0"/>
           </a:p>
         </p:txBody>
       </p:sp>
@@ -5662,7 +5463,7 @@
               <a:buNone/>
             </a:pPr>
             <a:r>
-              <a:rPr lang="en-US" sz="1700" dirty="0">
+              <a:rPr lang="en-US" sz="1500" dirty="0">
                 <a:solidFill>
                   <a:srgbClr val="FFFFFF"/>
                 </a:solidFill>
@@ -5670,9 +5471,9 @@
                 <a:ea typeface="Arial" pitchFamily="34" charset="-122"/>
                 <a:cs typeface="Arial" pitchFamily="34" charset="-120"/>
               </a:rPr>
-              <a:t>Carbon</a:t>
-            </a:r>
-            <a:endParaRPr lang="en-US" sz="1700" dirty="0"/>
+              <a:t>Proteins in them are used for growth and repair of body tissues, and lipids are used for energy storage</a:t>
+            </a:r>
+            <a:endParaRPr lang="en-US" sz="1500" dirty="0"/>
           </a:p>
         </p:txBody>
       </p:sp>
@@ -5780,7 +5581,7 @@
                 <a:ea typeface="Arial" pitchFamily="34" charset="-122"/>
                 <a:cs typeface="Arial" pitchFamily="34" charset="-120"/>
               </a:rPr>
-              <a:t>QUESTION 7 OF 8</a:t>
+              <a:t>QUESTION 7 OF 7</a:t>
             </a:r>
             <a:endParaRPr lang="en-US" sz="1300" dirty="0"/>
           </a:p>
@@ -5841,7 +5642,7 @@
                 <a:ea typeface="Arial" pitchFamily="34" charset="-122"/>
                 <a:cs typeface="Arial" pitchFamily="34" charset="-120"/>
               </a:rPr>
-              <a:t>Use after: Explain phase</a:t>
+              <a:t>Use after: Model Building phase</a:t>
             </a:r>
             <a:endParaRPr lang="en-US" sz="1100" dirty="0"/>
           </a:p>
@@ -5872,7 +5673,7 @@
               <a:buNone/>
             </a:pPr>
             <a:r>
-              <a:rPr lang="en-US" sz="2300" b="1" dirty="0">
+              <a:rPr lang="en-US" sz="1800" b="1" dirty="0">
                 <a:solidFill>
                   <a:srgbClr val="FFFFFF"/>
                 </a:solidFill>
@@ -5880,9 +5681,9 @@
                 <a:ea typeface="Arial" pitchFamily="34" charset="-122"/>
                 <a:cs typeface="Arial" pitchFamily="34" charset="-120"/>
               </a:rPr>
-              <a:t>A child from Kisumu eats only ugali every day and develops a swollen belly and thin limbs. Which explanation is best?</a:t>
-            </a:r>
-            <a:endParaRPr lang="en-US" sz="2300" dirty="0"/>
+              <a:t>Learners are updating their flow-diagram model of what happens to a meal of ugali, beans and cooking oil. Which arrow should be drawn thick, as the main cause of the glucose spike in the blood?</a:t>
+            </a:r>
+            <a:endParaRPr lang="en-US" sz="1800" dirty="0"/>
           </a:p>
         </p:txBody>
       </p:sp>
@@ -5972,7 +5773,7 @@
               <a:buNone/>
             </a:pPr>
             <a:r>
-              <a:rPr lang="en-US" sz="1300" dirty="0">
+              <a:rPr lang="en-US" sz="1700" dirty="0">
                 <a:solidFill>
                   <a:srgbClr val="FFFFFF"/>
                 </a:solidFill>
@@ -5980,9 +5781,9 @@
                 <a:ea typeface="Arial" pitchFamily="34" charset="-122"/>
                 <a:cs typeface="Arial" pitchFamily="34" charset="-120"/>
               </a:rPr>
-              <a:t>Ugali contains no glucose, so the child has no energy at all</a:t>
-            </a:r>
-            <a:endParaRPr lang="en-US" sz="1300" dirty="0"/>
+              <a:t>Proteins (beans, nyama choma) to glucose in blood</a:t>
+            </a:r>
+            <a:endParaRPr lang="en-US" sz="1700" dirty="0"/>
           </a:p>
         </p:txBody>
       </p:sp>
@@ -6072,7 +5873,7 @@
               <a:buNone/>
             </a:pPr>
             <a:r>
-              <a:rPr lang="en-US" sz="1300" dirty="0">
+              <a:rPr lang="en-US" sz="1700" dirty="0">
                 <a:solidFill>
                   <a:srgbClr val="FFFFFF"/>
                 </a:solidFill>
@@ -6080,9 +5881,9 @@
                 <a:ea typeface="Arial" pitchFamily="34" charset="-122"/>
                 <a:cs typeface="Arial" pitchFamily="34" charset="-120"/>
               </a:rPr>
-              <a:t>Githeri contains more starch than ugali, so it prevents kwashiorkor</a:t>
-            </a:r>
-            <a:endParaRPr lang="en-US" sz="1300" dirty="0"/>
+              <a:t>Carbohydrates (starch in ugali) to glucose in blood</a:t>
+            </a:r>
+            <a:endParaRPr lang="en-US" sz="1700" dirty="0"/>
           </a:p>
         </p:txBody>
       </p:sp>
@@ -6172,7 +5973,7 @@
               <a:buNone/>
             </a:pPr>
             <a:r>
-              <a:rPr lang="en-US" sz="1300" dirty="0">
+              <a:rPr lang="en-US" sz="1700" dirty="0">
                 <a:solidFill>
                   <a:srgbClr val="FFFFFF"/>
                 </a:solidFill>
@@ -6180,9 +5981,9 @@
                 <a:ea typeface="Arial" pitchFamily="34" charset="-122"/>
                 <a:cs typeface="Arial" pitchFamily="34" charset="-120"/>
               </a:rPr>
-              <a:t>Ugali is not enough in quantity, and the child would be healthy if given more ugali</a:t>
-            </a:r>
-            <a:endParaRPr lang="en-US" sz="1300" dirty="0"/>
+              <a:t>Proteins and lipids to glucose in blood, equally with carbohydrates</a:t>
+            </a:r>
+            <a:endParaRPr lang="en-US" sz="1700" dirty="0"/>
           </a:p>
         </p:txBody>
       </p:sp>
@@ -6272,7 +6073,7 @@
               <a:buNone/>
             </a:pPr>
             <a:r>
-              <a:rPr lang="en-US" sz="1300" dirty="0">
+              <a:rPr lang="en-US" sz="1700" dirty="0">
                 <a:solidFill>
                   <a:srgbClr val="FFFFFF"/>
                 </a:solidFill>
@@ -6280,9 +6081,9 @@
                 <a:ea typeface="Arial" pitchFamily="34" charset="-122"/>
                 <a:cs typeface="Arial" pitchFamily="34" charset="-120"/>
               </a:rPr>
-              <a:t>Ugali gives glucose for energy but no amino acids, so the body cannot build proteins such as muscle and albumin</a:t>
-            </a:r>
-            <a:endParaRPr lang="en-US" sz="1300" dirty="0"/>
+              <a:t>Lipids (cooking oil, groundnuts) to glucose in blood</a:t>
+            </a:r>
+            <a:endParaRPr lang="en-US" sz="1700" dirty="0"/>
           </a:p>
         </p:txBody>
       </p:sp>
@@ -6339,7 +6140,7 @@
     <p:bg>
       <p:bgPr>
         <a:solidFill>
-          <a:srgbClr val="6A4C93"/>
+          <a:srgbClr val="1F3864"/>
         </a:solidFill>
       </p:bgPr>
     </p:bg>
@@ -6365,124 +6166,24 @@
         </p:nvSpPr>
         <p:spPr>
           <a:xfrm>
-            <a:off x="548640" y="365760"/>
-            <a:ext cx="6400800" cy="365760"/>
-          </a:xfrm>
-          <a:prstGeom prst="rect">
-            <a:avLst/>
-          </a:prstGeom>
-          <a:noFill/>
-          <a:ln/>
-        </p:spPr>
-        <p:txBody>
-          <a:bodyPr wrap="square" lIns="0" tIns="0" rIns="0" bIns="0" rtlCol="0" anchor="ctr"/>
-          <a:lstStyle/>
-          <a:p>
-            <a:pPr indent="0" marL="0">
-              <a:buNone/>
-            </a:pPr>
-            <a:r>
-              <a:rPr lang="en-US" sz="1300" b="1" spc="200" kern="0" dirty="0">
-                <a:solidFill>
-                  <a:srgbClr val="E0D6F0"/>
-                </a:solidFill>
-                <a:latin typeface="Arial" pitchFamily="34" charset="0"/>
-                <a:ea typeface="Arial" pitchFamily="34" charset="-122"/>
-                <a:cs typeface="Arial" pitchFamily="34" charset="-120"/>
-              </a:rPr>
-              <a:t>QUESTION 8 OF 8</a:t>
-            </a:r>
-            <a:endParaRPr lang="en-US" sz="1300" dirty="0"/>
-          </a:p>
-        </p:txBody>
-      </p:sp>
-      <p:sp>
-        <p:nvSpPr>
-          <p:cNvPr id="3" name="Shape 1"/>
-          <p:cNvSpPr/>
-          <p:nvPr/>
-        </p:nvSpPr>
-        <p:spPr>
-          <a:xfrm>
-            <a:off x="8138160" y="320040"/>
-            <a:ext cx="3474720" cy="365760"/>
-          </a:xfrm>
-          <a:prstGeom prst="roundRect">
-            <a:avLst>
-              <a:gd name="adj" fmla="val 15000"/>
-            </a:avLst>
-          </a:prstGeom>
-          <a:solidFill>
-            <a:srgbClr val="5A3F80"/>
-          </a:solidFill>
-          <a:ln/>
-        </p:spPr>
-      </p:sp>
-      <p:sp>
-        <p:nvSpPr>
-          <p:cNvPr id="4" name="Text 2"/>
-          <p:cNvSpPr/>
-          <p:nvPr/>
-        </p:nvSpPr>
-        <p:spPr>
-          <a:xfrm>
-            <a:off x="8138160" y="320040"/>
-            <a:ext cx="3474720" cy="365760"/>
-          </a:xfrm>
-          <a:prstGeom prst="rect">
-            <a:avLst/>
-          </a:prstGeom>
-          <a:noFill/>
-          <a:ln/>
-        </p:spPr>
-        <p:txBody>
-          <a:bodyPr wrap="square" lIns="0" tIns="0" rIns="0" bIns="0" rtlCol="0" anchor="ctr"/>
-          <a:lstStyle/>
-          <a:p>
-            <a:pPr algn="ctr" indent="0" marL="0">
-              <a:buNone/>
-            </a:pPr>
-            <a:r>
-              <a:rPr lang="en-US" sz="1100" i="1" dirty="0">
-                <a:solidFill>
-                  <a:srgbClr val="E0D6F0"/>
-                </a:solidFill>
-                <a:latin typeface="Arial" pitchFamily="34" charset="0"/>
-                <a:ea typeface="Arial" pitchFamily="34" charset="-122"/>
-                <a:cs typeface="Arial" pitchFamily="34" charset="-120"/>
-              </a:rPr>
-              <a:t>Use after: End of lesson</a:t>
-            </a:r>
-            <a:endParaRPr lang="en-US" sz="1100" dirty="0"/>
-          </a:p>
-        </p:txBody>
-      </p:sp>
-      <p:sp>
-        <p:nvSpPr>
-          <p:cNvPr id="5" name="Text 3"/>
-          <p:cNvSpPr/>
-          <p:nvPr/>
-        </p:nvSpPr>
-        <p:spPr>
-          <a:xfrm>
-            <a:off x="548640" y="868680"/>
-            <a:ext cx="11064240" cy="1325880"/>
-          </a:xfrm>
-          <a:prstGeom prst="rect">
-            <a:avLst/>
-          </a:prstGeom>
-          <a:noFill/>
-          <a:ln/>
-        </p:spPr>
-        <p:txBody>
-          <a:bodyPr wrap="square" lIns="0" tIns="0" rIns="0" bIns="0" rtlCol="0" anchor="ctr"/>
-          <a:lstStyle/>
-          <a:p>
-            <a:pPr indent="0" marL="0">
-              <a:buNone/>
-            </a:pPr>
-            <a:r>
-              <a:rPr lang="en-US" sz="2300" b="1" dirty="0">
+            <a:off x="731520" y="2194560"/>
+            <a:ext cx="10698480" cy="822960"/>
+          </a:xfrm>
+          <a:prstGeom prst="rect">
+            <a:avLst/>
+          </a:prstGeom>
+          <a:noFill/>
+          <a:ln/>
+        </p:spPr>
+        <p:txBody>
+          <a:bodyPr wrap="square" lIns="0" tIns="0" rIns="0" bIns="0" rtlCol="0" anchor="ctr"/>
+          <a:lstStyle/>
+          <a:p>
+            <a:pPr indent="0" marL="0">
+              <a:buNone/>
+            </a:pPr>
+            <a:r>
+              <a:rPr lang="en-US" sz="3400" b="1" dirty="0">
                 <a:solidFill>
                   <a:srgbClr val="FFFFFF"/>
                 </a:solidFill>
@@ -6490,448 +6191,48 @@
                 <a:ea typeface="Arial" pitchFamily="34" charset="-122"/>
                 <a:cs typeface="Arial" pitchFamily="34" charset="-120"/>
               </a:rPr>
-              <a:t>Which pair correctly matches a molecule with its main function in the body?</a:t>
-            </a:r>
-            <a:endParaRPr lang="en-US" sz="2300" dirty="0"/>
-          </a:p>
-        </p:txBody>
-      </p:sp>
-      <p:sp>
-        <p:nvSpPr>
-          <p:cNvPr id="6" name="Shape 4"/>
-          <p:cNvSpPr/>
-          <p:nvPr/>
-        </p:nvSpPr>
-        <p:spPr>
-          <a:xfrm>
-            <a:off x="731520" y="2331720"/>
-            <a:ext cx="10698480" cy="777240"/>
-          </a:xfrm>
-          <a:prstGeom prst="roundRect">
-            <a:avLst>
-              <a:gd name="adj" fmla="val 9412"/>
-            </a:avLst>
-          </a:prstGeom>
-          <a:solidFill>
-            <a:srgbClr val="7C5CAA"/>
-          </a:solidFill>
-          <a:ln/>
-        </p:spPr>
-      </p:sp>
-      <p:sp>
-        <p:nvSpPr>
-          <p:cNvPr id="7" name="Text 5"/>
-          <p:cNvSpPr/>
-          <p:nvPr/>
-        </p:nvSpPr>
-        <p:spPr>
-          <a:xfrm>
-            <a:off x="914400" y="2331720"/>
-            <a:ext cx="548640" cy="777240"/>
-          </a:xfrm>
-          <a:prstGeom prst="rect">
-            <a:avLst/>
-          </a:prstGeom>
-          <a:noFill/>
-          <a:ln/>
-        </p:spPr>
-        <p:txBody>
-          <a:bodyPr wrap="square" lIns="0" tIns="0" rIns="0" bIns="0" rtlCol="0" anchor="ctr"/>
-          <a:lstStyle/>
-          <a:p>
-            <a:pPr indent="0" marL="0">
-              <a:buNone/>
-            </a:pPr>
-            <a:r>
-              <a:rPr lang="en-US" sz="1800" b="1" dirty="0">
-                <a:solidFill>
-                  <a:srgbClr val="FFFFFF"/>
-                </a:solidFill>
-                <a:latin typeface="Arial" pitchFamily="34" charset="0"/>
-                <a:ea typeface="Arial" pitchFamily="34" charset="-122"/>
-                <a:cs typeface="Arial" pitchFamily="34" charset="-120"/>
-              </a:rPr>
-              <a:t>A</a:t>
+              <a:t>All done</a:t>
+            </a:r>
+            <a:endParaRPr lang="en-US" sz="3400" dirty="0"/>
+          </a:p>
+        </p:txBody>
+      </p:sp>
+      <p:sp>
+        <p:nvSpPr>
+          <p:cNvPr id="3" name="Text 1"/>
+          <p:cNvSpPr/>
+          <p:nvPr/>
+        </p:nvSpPr>
+        <p:spPr>
+          <a:xfrm>
+            <a:off x="731520" y="3108960"/>
+            <a:ext cx="10698480" cy="731520"/>
+          </a:xfrm>
+          <a:prstGeom prst="rect">
+            <a:avLst/>
+          </a:prstGeom>
+          <a:noFill/>
+          <a:ln/>
+        </p:spPr>
+        <p:txBody>
+          <a:bodyPr wrap="square" lIns="0" tIns="0" rIns="0" bIns="0" rtlCol="0" anchor="ctr"/>
+          <a:lstStyle/>
+          <a:p>
+            <a:pPr indent="0" marL="0">
+              <a:buNone/>
+            </a:pPr>
+            <a:r>
+              <a:rPr lang="en-US" sz="1800" dirty="0">
+                <a:solidFill>
+                  <a:srgbClr val="D9EEF1"/>
+                </a:solidFill>
+                <a:latin typeface="Arial" pitchFamily="34" charset="0"/>
+                <a:ea typeface="Arial" pitchFamily="34" charset="-122"/>
+                <a:cs typeface="Arial" pitchFamily="34" charset="-120"/>
+              </a:rPr>
+              <a:t>Ask your teacher how to submit your answers today (for example, on a paper answer slip).</a:t>
             </a:r>
             <a:endParaRPr lang="en-US" sz="1800" dirty="0"/>
-          </a:p>
-        </p:txBody>
-      </p:sp>
-      <p:sp>
-        <p:nvSpPr>
-          <p:cNvPr id="8" name="Text 6"/>
-          <p:cNvSpPr/>
-          <p:nvPr/>
-        </p:nvSpPr>
-        <p:spPr>
-          <a:xfrm>
-            <a:off x="1554480" y="2331720"/>
-            <a:ext cx="9692640" cy="777240"/>
-          </a:xfrm>
-          <a:prstGeom prst="rect">
-            <a:avLst/>
-          </a:prstGeom>
-          <a:noFill/>
-          <a:ln/>
-        </p:spPr>
-        <p:txBody>
-          <a:bodyPr wrap="square" lIns="0" tIns="0" rIns="0" bIns="0" rtlCol="0" anchor="ctr"/>
-          <a:lstStyle/>
-          <a:p>
-            <a:pPr indent="0" marL="0">
-              <a:buNone/>
-            </a:pPr>
-            <a:r>
-              <a:rPr lang="en-US" sz="1700" dirty="0">
-                <a:solidFill>
-                  <a:srgbClr val="FFFFFF"/>
-                </a:solidFill>
-                <a:latin typeface="Arial" pitchFamily="34" charset="0"/>
-                <a:ea typeface="Arial" pitchFamily="34" charset="-122"/>
-                <a:cs typeface="Arial" pitchFamily="34" charset="-120"/>
-              </a:rPr>
-              <a:t>Haemoglobin: energy storage</a:t>
-            </a:r>
-            <a:endParaRPr lang="en-US" sz="1700" dirty="0"/>
-          </a:p>
-        </p:txBody>
-      </p:sp>
-      <p:sp>
-        <p:nvSpPr>
-          <p:cNvPr id="9" name="Shape 7"/>
-          <p:cNvSpPr/>
-          <p:nvPr/>
-        </p:nvSpPr>
-        <p:spPr>
-          <a:xfrm>
-            <a:off x="731520" y="3246120"/>
-            <a:ext cx="10698480" cy="777240"/>
-          </a:xfrm>
-          <a:prstGeom prst="roundRect">
-            <a:avLst>
-              <a:gd name="adj" fmla="val 9412"/>
-            </a:avLst>
-          </a:prstGeom>
-          <a:solidFill>
-            <a:srgbClr val="7C5CAA"/>
-          </a:solidFill>
-          <a:ln/>
-        </p:spPr>
-      </p:sp>
-      <p:sp>
-        <p:nvSpPr>
-          <p:cNvPr id="10" name="Text 8"/>
-          <p:cNvSpPr/>
-          <p:nvPr/>
-        </p:nvSpPr>
-        <p:spPr>
-          <a:xfrm>
-            <a:off x="914400" y="3246120"/>
-            <a:ext cx="548640" cy="777240"/>
-          </a:xfrm>
-          <a:prstGeom prst="rect">
-            <a:avLst/>
-          </a:prstGeom>
-          <a:noFill/>
-          <a:ln/>
-        </p:spPr>
-        <p:txBody>
-          <a:bodyPr wrap="square" lIns="0" tIns="0" rIns="0" bIns="0" rtlCol="0" anchor="ctr"/>
-          <a:lstStyle/>
-          <a:p>
-            <a:pPr indent="0" marL="0">
-              <a:buNone/>
-            </a:pPr>
-            <a:r>
-              <a:rPr lang="en-US" sz="1800" b="1" dirty="0">
-                <a:solidFill>
-                  <a:srgbClr val="FFFFFF"/>
-                </a:solidFill>
-                <a:latin typeface="Arial" pitchFamily="34" charset="0"/>
-                <a:ea typeface="Arial" pitchFamily="34" charset="-122"/>
-                <a:cs typeface="Arial" pitchFamily="34" charset="-120"/>
-              </a:rPr>
-              <a:t>B</a:t>
-            </a:r>
-            <a:endParaRPr lang="en-US" sz="1800" dirty="0"/>
-          </a:p>
-        </p:txBody>
-      </p:sp>
-      <p:sp>
-        <p:nvSpPr>
-          <p:cNvPr id="11" name="Text 9"/>
-          <p:cNvSpPr/>
-          <p:nvPr/>
-        </p:nvSpPr>
-        <p:spPr>
-          <a:xfrm>
-            <a:off x="1554480" y="3246120"/>
-            <a:ext cx="9692640" cy="777240"/>
-          </a:xfrm>
-          <a:prstGeom prst="rect">
-            <a:avLst/>
-          </a:prstGeom>
-          <a:noFill/>
-          <a:ln/>
-        </p:spPr>
-        <p:txBody>
-          <a:bodyPr wrap="square" lIns="0" tIns="0" rIns="0" bIns="0" rtlCol="0" anchor="ctr"/>
-          <a:lstStyle/>
-          <a:p>
-            <a:pPr indent="0" marL="0">
-              <a:buNone/>
-            </a:pPr>
-            <a:r>
-              <a:rPr lang="en-US" sz="1700" dirty="0">
-                <a:solidFill>
-                  <a:srgbClr val="FFFFFF"/>
-                </a:solidFill>
-                <a:latin typeface="Arial" pitchFamily="34" charset="0"/>
-                <a:ea typeface="Arial" pitchFamily="34" charset="-122"/>
-                <a:cs typeface="Arial" pitchFamily="34" charset="-120"/>
-              </a:rPr>
-              <a:t>Haemoglobin: a transport protein that carries oxygen</a:t>
-            </a:r>
-            <a:endParaRPr lang="en-US" sz="1700" dirty="0"/>
-          </a:p>
-        </p:txBody>
-      </p:sp>
-      <p:sp>
-        <p:nvSpPr>
-          <p:cNvPr id="12" name="Shape 10"/>
-          <p:cNvSpPr/>
-          <p:nvPr/>
-        </p:nvSpPr>
-        <p:spPr>
-          <a:xfrm>
-            <a:off x="731520" y="4160520"/>
-            <a:ext cx="10698480" cy="777240"/>
-          </a:xfrm>
-          <a:prstGeom prst="roundRect">
-            <a:avLst>
-              <a:gd name="adj" fmla="val 9412"/>
-            </a:avLst>
-          </a:prstGeom>
-          <a:solidFill>
-            <a:srgbClr val="7C5CAA"/>
-          </a:solidFill>
-          <a:ln/>
-        </p:spPr>
-      </p:sp>
-      <p:sp>
-        <p:nvSpPr>
-          <p:cNvPr id="13" name="Text 11"/>
-          <p:cNvSpPr/>
-          <p:nvPr/>
-        </p:nvSpPr>
-        <p:spPr>
-          <a:xfrm>
-            <a:off x="914400" y="4160520"/>
-            <a:ext cx="548640" cy="777240"/>
-          </a:xfrm>
-          <a:prstGeom prst="rect">
-            <a:avLst/>
-          </a:prstGeom>
-          <a:noFill/>
-          <a:ln/>
-        </p:spPr>
-        <p:txBody>
-          <a:bodyPr wrap="square" lIns="0" tIns="0" rIns="0" bIns="0" rtlCol="0" anchor="ctr"/>
-          <a:lstStyle/>
-          <a:p>
-            <a:pPr indent="0" marL="0">
-              <a:buNone/>
-            </a:pPr>
-            <a:r>
-              <a:rPr lang="en-US" sz="1800" b="1" dirty="0">
-                <a:solidFill>
-                  <a:srgbClr val="FFFFFF"/>
-                </a:solidFill>
-                <a:latin typeface="Arial" pitchFamily="34" charset="0"/>
-                <a:ea typeface="Arial" pitchFamily="34" charset="-122"/>
-                <a:cs typeface="Arial" pitchFamily="34" charset="-120"/>
-              </a:rPr>
-              <a:t>C</a:t>
-            </a:r>
-            <a:endParaRPr lang="en-US" sz="1800" dirty="0"/>
-          </a:p>
-        </p:txBody>
-      </p:sp>
-      <p:sp>
-        <p:nvSpPr>
-          <p:cNvPr id="14" name="Text 12"/>
-          <p:cNvSpPr/>
-          <p:nvPr/>
-        </p:nvSpPr>
-        <p:spPr>
-          <a:xfrm>
-            <a:off x="1554480" y="4160520"/>
-            <a:ext cx="9692640" cy="777240"/>
-          </a:xfrm>
-          <a:prstGeom prst="rect">
-            <a:avLst/>
-          </a:prstGeom>
-          <a:noFill/>
-          <a:ln/>
-        </p:spPr>
-        <p:txBody>
-          <a:bodyPr wrap="square" lIns="0" tIns="0" rIns="0" bIns="0" rtlCol="0" anchor="ctr"/>
-          <a:lstStyle/>
-          <a:p>
-            <a:pPr indent="0" marL="0">
-              <a:buNone/>
-            </a:pPr>
-            <a:r>
-              <a:rPr lang="en-US" sz="1700" dirty="0">
-                <a:solidFill>
-                  <a:srgbClr val="FFFFFF"/>
-                </a:solidFill>
-                <a:latin typeface="Arial" pitchFamily="34" charset="0"/>
-                <a:ea typeface="Arial" pitchFamily="34" charset="-122"/>
-                <a:cs typeface="Arial" pitchFamily="34" charset="-120"/>
-              </a:rPr>
-              <a:t>Glucose: transports oxygen in the blood</a:t>
-            </a:r>
-            <a:endParaRPr lang="en-US" sz="1700" dirty="0"/>
-          </a:p>
-        </p:txBody>
-      </p:sp>
-      <p:sp>
-        <p:nvSpPr>
-          <p:cNvPr id="15" name="Shape 13"/>
-          <p:cNvSpPr/>
-          <p:nvPr/>
-        </p:nvSpPr>
-        <p:spPr>
-          <a:xfrm>
-            <a:off x="731520" y="5074920"/>
-            <a:ext cx="10698480" cy="777240"/>
-          </a:xfrm>
-          <a:prstGeom prst="roundRect">
-            <a:avLst>
-              <a:gd name="adj" fmla="val 9412"/>
-            </a:avLst>
-          </a:prstGeom>
-          <a:solidFill>
-            <a:srgbClr val="7C5CAA"/>
-          </a:solidFill>
-          <a:ln/>
-        </p:spPr>
-      </p:sp>
-      <p:sp>
-        <p:nvSpPr>
-          <p:cNvPr id="16" name="Text 14"/>
-          <p:cNvSpPr/>
-          <p:nvPr/>
-        </p:nvSpPr>
-        <p:spPr>
-          <a:xfrm>
-            <a:off x="914400" y="5074920"/>
-            <a:ext cx="548640" cy="777240"/>
-          </a:xfrm>
-          <a:prstGeom prst="rect">
-            <a:avLst/>
-          </a:prstGeom>
-          <a:noFill/>
-          <a:ln/>
-        </p:spPr>
-        <p:txBody>
-          <a:bodyPr wrap="square" lIns="0" tIns="0" rIns="0" bIns="0" rtlCol="0" anchor="ctr"/>
-          <a:lstStyle/>
-          <a:p>
-            <a:pPr indent="0" marL="0">
-              <a:buNone/>
-            </a:pPr>
-            <a:r>
-              <a:rPr lang="en-US" sz="1800" b="1" dirty="0">
-                <a:solidFill>
-                  <a:srgbClr val="FFFFFF"/>
-                </a:solidFill>
-                <a:latin typeface="Arial" pitchFamily="34" charset="0"/>
-                <a:ea typeface="Arial" pitchFamily="34" charset="-122"/>
-                <a:cs typeface="Arial" pitchFamily="34" charset="-120"/>
-              </a:rPr>
-              <a:t>D</a:t>
-            </a:r>
-            <a:endParaRPr lang="en-US" sz="1800" dirty="0"/>
-          </a:p>
-        </p:txBody>
-      </p:sp>
-      <p:sp>
-        <p:nvSpPr>
-          <p:cNvPr id="17" name="Text 15"/>
-          <p:cNvSpPr/>
-          <p:nvPr/>
-        </p:nvSpPr>
-        <p:spPr>
-          <a:xfrm>
-            <a:off x="1554480" y="5074920"/>
-            <a:ext cx="9692640" cy="777240"/>
-          </a:xfrm>
-          <a:prstGeom prst="rect">
-            <a:avLst/>
-          </a:prstGeom>
-          <a:noFill/>
-          <a:ln/>
-        </p:spPr>
-        <p:txBody>
-          <a:bodyPr wrap="square" lIns="0" tIns="0" rIns="0" bIns="0" rtlCol="0" anchor="ctr"/>
-          <a:lstStyle/>
-          <a:p>
-            <a:pPr indent="0" marL="0">
-              <a:buNone/>
-            </a:pPr>
-            <a:r>
-              <a:rPr lang="en-US" sz="1700" dirty="0">
-                <a:solidFill>
-                  <a:srgbClr val="FFFFFF"/>
-                </a:solidFill>
-                <a:latin typeface="Arial" pitchFamily="34" charset="0"/>
-                <a:ea typeface="Arial" pitchFamily="34" charset="-122"/>
-                <a:cs typeface="Arial" pitchFamily="34" charset="-120"/>
-              </a:rPr>
-              <a:t>Glycogen: body building and repair</a:t>
-            </a:r>
-            <a:endParaRPr lang="en-US" sz="1700" dirty="0"/>
-          </a:p>
-        </p:txBody>
-      </p:sp>
-      <p:sp>
-        <p:nvSpPr>
-          <p:cNvPr id="18" name="Text 16"/>
-          <p:cNvSpPr/>
-          <p:nvPr/>
-        </p:nvSpPr>
-        <p:spPr>
-          <a:xfrm>
-            <a:off x="11521440" y="6446520"/>
-            <a:ext cx="457200" cy="274320"/>
-          </a:xfrm>
-          <a:prstGeom prst="rect">
-            <a:avLst/>
-          </a:prstGeom>
-          <a:noFill/>
-          <a:ln/>
-        </p:spPr>
-        <p:txBody>
-          <a:bodyPr wrap="square" lIns="0" tIns="0" rIns="0" bIns="0" rtlCol="0" anchor="ctr"/>
-          <a:lstStyle/>
-          <a:p>
-            <a:pPr algn="r" indent="0" marL="0">
-              <a:buNone/>
-            </a:pPr>
-            <a:r>
-              <a:rPr lang="en-US" sz="1000" dirty="0">
-                <a:solidFill>
-                  <a:srgbClr val="C9B8E0"/>
-                </a:solidFill>
-                <a:latin typeface="Arial" pitchFamily="34" charset="0"/>
-                <a:ea typeface="Arial" pitchFamily="34" charset="-122"/>
-                <a:cs typeface="Arial" pitchFamily="34" charset="-120"/>
-              </a:rPr>
-              <a:t>9</a:t>
-            </a:r>
-            <a:endParaRPr lang="en-US" sz="1000" dirty="0"/>
           </a:p>
         </p:txBody>
       </p:sp>
